--- a/First_Semester/Data Structure and Algorithm/9. Graph.pptx
+++ b/First_Semester/Data Structure and Algorithm/9. Graph.pptx
@@ -327,7 +327,7 @@
               <a:pPr>
                 <a:defRPr/>
               </a:pPr>
-              <a:t>3/21/2024</a:t>
+              <a:t>5/20/2026</a:t>
             </a:fld>
             <a:endParaRPr lang="en-US" dirty="0"/>
           </a:p>
@@ -577,7 +577,7 @@
               <a:pPr>
                 <a:defRPr/>
               </a:pPr>
-              <a:t>3/21/2024</a:t>
+              <a:t>5/20/2026</a:t>
             </a:fld>
             <a:endParaRPr lang="en-US" dirty="0"/>
           </a:p>
@@ -1186,7 +1186,7 @@
             </a:pPr>
             <a:fld id="{20106C3D-545F-421B-905E-AD1DCBE98C49}" type="datetime1">
               <a:rPr lang="en-US" smtClean="0"/>
-              <a:t>3/21/2024</a:t>
+              <a:t>5/20/2026</a:t>
             </a:fld>
             <a:endParaRPr lang="en-US" dirty="0"/>
           </a:p>
@@ -1353,7 +1353,7 @@
             </a:pPr>
             <a:fld id="{70D4A443-3B3E-4EEE-A401-587C07EC7292}" type="datetime1">
               <a:rPr lang="en-US" smtClean="0"/>
-              <a:t>3/21/2024</a:t>
+              <a:t>5/20/2026</a:t>
             </a:fld>
             <a:endParaRPr lang="en-US" dirty="0"/>
           </a:p>
@@ -1530,7 +1530,7 @@
             </a:pPr>
             <a:fld id="{8C29FEC1-0386-4F4D-BA89-7968DA924092}" type="datetime1">
               <a:rPr lang="en-US" smtClean="0"/>
-              <a:t>3/21/2024</a:t>
+              <a:t>5/20/2026</a:t>
             </a:fld>
             <a:endParaRPr lang="en-US" dirty="0"/>
           </a:p>
@@ -1764,7 +1764,7 @@
             </a:pPr>
             <a:fld id="{CA594460-5068-4006-9B33-342C54397CF4}" type="datetime1">
               <a:rPr lang="en-US" smtClean="0"/>
-              <a:t>3/21/2024</a:t>
+              <a:t>5/20/2026</a:t>
             </a:fld>
             <a:endParaRPr lang="en-US" dirty="0"/>
           </a:p>
@@ -1931,7 +1931,7 @@
             </a:pPr>
             <a:fld id="{29670C6A-5D8E-4441-A508-5C22D651CBC9}" type="datetime1">
               <a:rPr lang="en-US" smtClean="0"/>
-              <a:t>3/21/2024</a:t>
+              <a:t>5/20/2026</a:t>
             </a:fld>
             <a:endParaRPr lang="en-US" dirty="0"/>
           </a:p>
@@ -2131,7 +2131,7 @@
             </a:pPr>
             <a:fld id="{04BE9E39-D3E2-4411-BFEF-CD5AFD04D85D}" type="datetime1">
               <a:rPr lang="en-US" smtClean="0"/>
-              <a:t>3/21/2024</a:t>
+              <a:t>5/20/2026</a:t>
             </a:fld>
             <a:endParaRPr lang="en-US" dirty="0"/>
           </a:p>
@@ -2416,7 +2416,7 @@
             </a:pPr>
             <a:fld id="{B43148B2-67FE-4779-A023-46B2F45F7780}" type="datetime1">
               <a:rPr lang="en-US" smtClean="0"/>
-              <a:t>3/21/2024</a:t>
+              <a:t>5/20/2026</a:t>
             </a:fld>
             <a:endParaRPr lang="en-US" dirty="0"/>
           </a:p>
@@ -2840,7 +2840,7 @@
             </a:pPr>
             <a:fld id="{B1AA7A04-417F-4EBA-BA78-AFE5F5B0E252}" type="datetime1">
               <a:rPr lang="en-US" smtClean="0"/>
-              <a:t>3/21/2024</a:t>
+              <a:t>5/20/2026</a:t>
             </a:fld>
             <a:endParaRPr lang="en-US" dirty="0"/>
           </a:p>
@@ -2955,7 +2955,7 @@
             </a:pPr>
             <a:fld id="{5ED92B3A-CE5F-4E20-BE84-88D161079FD7}" type="datetime1">
               <a:rPr lang="en-US" smtClean="0"/>
-              <a:t>3/21/2024</a:t>
+              <a:t>5/20/2026</a:t>
             </a:fld>
             <a:endParaRPr lang="en-US" dirty="0"/>
           </a:p>
@@ -3047,7 +3047,7 @@
             </a:pPr>
             <a:fld id="{0A551BDD-BFA0-436D-9881-052F84059F22}" type="datetime1">
               <a:rPr lang="en-US" smtClean="0"/>
-              <a:t>3/21/2024</a:t>
+              <a:t>5/20/2026</a:t>
             </a:fld>
             <a:endParaRPr lang="en-US" dirty="0"/>
           </a:p>
@@ -3321,7 +3321,7 @@
             </a:pPr>
             <a:fld id="{5D0695CE-A621-47F9-8FE0-162CC4B7FFA6}" type="datetime1">
               <a:rPr lang="en-US" smtClean="0"/>
-              <a:t>3/21/2024</a:t>
+              <a:t>5/20/2026</a:t>
             </a:fld>
             <a:endParaRPr lang="en-US" dirty="0"/>
           </a:p>
@@ -3572,7 +3572,7 @@
             </a:pPr>
             <a:fld id="{30411134-B46A-49A8-8916-C8B63871D1AF}" type="datetime1">
               <a:rPr lang="en-US" smtClean="0"/>
-              <a:t>3/21/2024</a:t>
+              <a:t>5/20/2026</a:t>
             </a:fld>
             <a:endParaRPr lang="en-US" dirty="0"/>
           </a:p>
@@ -3816,7 +3816,7 @@
             </a:pPr>
             <a:fld id="{F10B24E9-5F91-4748-93A4-C3D6E27D0E79}" type="datetime1">
               <a:rPr lang="en-US" smtClean="0"/>
-              <a:t>3/21/2024</a:t>
+              <a:t>5/20/2026</a:t>
             </a:fld>
             <a:endParaRPr lang="en-US" dirty="0"/>
           </a:p>
@@ -4601,15 +4601,7 @@
                 <a:ea typeface="Calibri" panose="020F0502020204030204" pitchFamily="34" charset="0"/>
                 <a:cs typeface="Calibri" panose="020F0502020204030204" pitchFamily="34" charset="0"/>
               </a:rPr>
-              <a:t>Lecture </a:t>
-            </a:r>
-            <a:r>
-              <a:rPr lang="en-US" sz="20000" dirty="0">
-                <a:latin typeface="Calibri" panose="020F0502020204030204" pitchFamily="34" charset="0"/>
-                <a:ea typeface="Calibri" panose="020F0502020204030204" pitchFamily="34" charset="0"/>
-                <a:cs typeface="Calibri" panose="020F0502020204030204" pitchFamily="34" charset="0"/>
-              </a:rPr>
-              <a:t>9</a:t>
+              <a:t>Lecture 9</a:t>
             </a:r>
             <a:endParaRPr lang="en-US" sz="19200" dirty="0">
               <a:latin typeface="Calibri" panose="020F0502020204030204" pitchFamily="34" charset="0"/>
@@ -6203,17 +6195,8 @@
               <a:rPr lang="en-US" sz="2800" dirty="0" smtClean="0">
                 <a:effectLst/>
               </a:rPr>
-              <a:t>) = </a:t>
-            </a:r>
-            <a:r>
-              <a:rPr lang="en-US" sz="2800" dirty="0" smtClean="0">
-                <a:effectLst/>
-              </a:rPr>
-              <a:t>2</a:t>
-            </a:r>
-            <a:endParaRPr lang="en-US" sz="2800" dirty="0" smtClean="0">
-              <a:effectLst/>
-            </a:endParaRPr>
+              <a:t>) = 2</a:t>
+            </a:r>
           </a:p>
         </p:txBody>
       </p:sp>
@@ -8155,17 +8138,8 @@
               <a:rPr lang="en-US" sz="2800" dirty="0" smtClean="0">
                 <a:effectLst/>
               </a:rPr>
-              <a:t>) = </a:t>
-            </a:r>
-            <a:r>
-              <a:rPr lang="en-US" sz="2800" dirty="0" smtClean="0">
-                <a:effectLst/>
-              </a:rPr>
-              <a:t>1</a:t>
-            </a:r>
-            <a:endParaRPr lang="en-US" sz="2800" dirty="0" smtClean="0">
-              <a:effectLst/>
-            </a:endParaRPr>
+              <a:t>) = 1</a:t>
+            </a:r>
           </a:p>
         </p:txBody>
       </p:sp>
@@ -9612,7 +9586,7 @@
           <a:graphicData uri="http://schemas.openxmlformats.org/presentationml/2006/ole">
             <mc:AlternateContent xmlns:mc="http://schemas.openxmlformats.org/markup-compatibility/2006">
               <mc:Choice xmlns:v="urn:schemas-microsoft-com:vml" Requires="v">
-                <p:oleObj spid="_x0000_s4171" name="Document" r:id="rId3" imgW="5236498" imgH="4384441" progId="Word.Document.8">
+                <p:oleObj spid="_x0000_s4175" name="Document" r:id="rId3" imgW="5236498" imgH="4384441" progId="Word.Document.8">
                   <p:embed/>
                 </p:oleObj>
               </mc:Choice>
@@ -10403,7 +10377,7 @@
           <a:graphicData uri="http://schemas.openxmlformats.org/presentationml/2006/ole">
             <mc:AlternateContent xmlns:mc="http://schemas.openxmlformats.org/markup-compatibility/2006">
               <mc:Choice xmlns:v="urn:schemas-microsoft-com:vml" Requires="v">
-                <p:oleObj spid="_x0000_s5195" name="Equation" r:id="rId3" imgW="1231560" imgH="1143000" progId="Equation.3">
+                <p:oleObj spid="_x0000_s5199" name="Equation" r:id="rId3" imgW="1231560" imgH="1143000" progId="Equation.3">
                   <p:embed/>
                 </p:oleObj>
               </mc:Choice>
@@ -10716,7 +10690,7 @@
           <a:graphicData uri="http://schemas.openxmlformats.org/presentationml/2006/ole">
             <mc:AlternateContent xmlns:mc="http://schemas.openxmlformats.org/markup-compatibility/2006">
               <mc:Choice xmlns:v="urn:schemas-microsoft-com:vml" Requires="v">
-                <p:oleObj spid="_x0000_s6219" name="Equation" r:id="rId3" imgW="1282680" imgH="1054080" progId="Equation.3">
+                <p:oleObj spid="_x0000_s6223" name="Equation" r:id="rId3" imgW="1282680" imgH="1054080" progId="Equation.3">
                   <p:embed/>
                 </p:oleObj>
               </mc:Choice>
@@ -11784,7 +11758,7 @@
           <a:graphicData uri="http://schemas.openxmlformats.org/presentationml/2006/ole">
             <mc:AlternateContent xmlns:mc="http://schemas.openxmlformats.org/markup-compatibility/2006">
               <mc:Choice xmlns:v="urn:schemas-microsoft-com:vml" Requires="v">
-                <p:oleObj spid="_x0000_s7243" name="Equation" r:id="rId3" imgW="876240" imgH="914400" progId="Equation.3">
+                <p:oleObj spid="_x0000_s7247" name="Equation" r:id="rId3" imgW="876240" imgH="914400" progId="Equation.3">
                   <p:embed/>
                 </p:oleObj>
               </mc:Choice>
@@ -12690,8 +12664,20 @@
             <a:tbl>
               <a:tblPr/>
               <a:tblGrid>
-                <a:gridCol w="1714500"/>
-                <a:gridCol w="1714500"/>
+                <a:gridCol w="1714500">
+                  <a:extLst>
+                    <a:ext uri="{9D8B030D-6E8A-4147-A177-3AD203B41FA5}">
+                      <a16:colId xmlns:a16="http://schemas.microsoft.com/office/drawing/2014/main" val="20000"/>
+                    </a:ext>
+                  </a:extLst>
+                </a:gridCol>
+                <a:gridCol w="1714500">
+                  <a:extLst>
+                    <a:ext uri="{9D8B030D-6E8A-4147-A177-3AD203B41FA5}">
+                      <a16:colId xmlns:a16="http://schemas.microsoft.com/office/drawing/2014/main" val="20001"/>
+                    </a:ext>
+                  </a:extLst>
+                </a:gridCol>
               </a:tblGrid>
               <a:tr h="838200">
                 <a:tc>
@@ -12858,6 +12844,11 @@
                     <a:noFill/>
                   </a:tcPr>
                 </a:tc>
+                <a:extLst>
+                  <a:ext uri="{0D108BD9-81ED-4DB2-BD59-A6C34878D82A}">
+                    <a16:rowId xmlns:a16="http://schemas.microsoft.com/office/drawing/2014/main" val="10000"/>
+                  </a:ext>
+                </a:extLst>
               </a:tr>
               <a:tr h="384537">
                 <a:tc>
@@ -13024,6 +13015,11 @@
                     <a:noFill/>
                   </a:tcPr>
                 </a:tc>
+                <a:extLst>
+                  <a:ext uri="{0D108BD9-81ED-4DB2-BD59-A6C34878D82A}">
+                    <a16:rowId xmlns:a16="http://schemas.microsoft.com/office/drawing/2014/main" val="10001"/>
+                  </a:ext>
+                </a:extLst>
               </a:tr>
               <a:tr h="409267">
                 <a:tc>
@@ -13190,6 +13186,11 @@
                     <a:noFill/>
                   </a:tcPr>
                 </a:tc>
+                <a:extLst>
+                  <a:ext uri="{0D108BD9-81ED-4DB2-BD59-A6C34878D82A}">
+                    <a16:rowId xmlns:a16="http://schemas.microsoft.com/office/drawing/2014/main" val="10002"/>
+                  </a:ext>
+                </a:extLst>
               </a:tr>
               <a:tr h="405784">
                 <a:tc>
@@ -13356,6 +13357,11 @@
                     <a:noFill/>
                   </a:tcPr>
                 </a:tc>
+                <a:extLst>
+                  <a:ext uri="{0D108BD9-81ED-4DB2-BD59-A6C34878D82A}">
+                    <a16:rowId xmlns:a16="http://schemas.microsoft.com/office/drawing/2014/main" val="10003"/>
+                  </a:ext>
+                </a:extLst>
               </a:tr>
               <a:tr h="367818">
                 <a:tc>
@@ -13519,6 +13525,11 @@
                     <a:noFill/>
                   </a:tcPr>
                 </a:tc>
+                <a:extLst>
+                  <a:ext uri="{0D108BD9-81ED-4DB2-BD59-A6C34878D82A}">
+                    <a16:rowId xmlns:a16="http://schemas.microsoft.com/office/drawing/2014/main" val="10004"/>
+                  </a:ext>
+                </a:extLst>
               </a:tr>
               <a:tr h="367818">
                 <a:tc>
@@ -13685,6 +13696,11 @@
                     <a:noFill/>
                   </a:tcPr>
                 </a:tc>
+                <a:extLst>
+                  <a:ext uri="{0D108BD9-81ED-4DB2-BD59-A6C34878D82A}">
+                    <a16:rowId xmlns:a16="http://schemas.microsoft.com/office/drawing/2014/main" val="10005"/>
+                  </a:ext>
+                </a:extLst>
               </a:tr>
             </a:tbl>
           </a:graphicData>
@@ -14433,7 +14449,7 @@
           <a:graphicData uri="http://schemas.openxmlformats.org/presentationml/2006/ole">
             <mc:AlternateContent xmlns:mc="http://schemas.openxmlformats.org/markup-compatibility/2006">
               <mc:Choice xmlns:v="urn:schemas-microsoft-com:vml" Requires="v">
-                <p:oleObj spid="_x0000_s9291" name="Equation" r:id="rId3" imgW="1422360" imgH="977760" progId="Equation.3">
+                <p:oleObj spid="_x0000_s9295" name="Equation" r:id="rId3" imgW="1422360" imgH="977760" progId="Equation.3">
                   <p:embed/>
                 </p:oleObj>
               </mc:Choice>
@@ -14726,7 +14742,7 @@
           <a:lstStyle/>
           <a:p>
             <a:r>
-              <a:rPr lang="en-US" smtClean="0"/>
+              <a:rPr lang="en-US" dirty="0" smtClean="0"/>
               <a:t>Incidence Matrices</a:t>
             </a:r>
           </a:p>
@@ -14758,95 +14774,104 @@
           <a:p>
             <a:pPr algn="just"/>
             <a:r>
-              <a:rPr lang="en-US" sz="2800" smtClean="0">
+              <a:rPr lang="en-US" sz="2800" dirty="0" smtClean="0">
                 <a:effectLst/>
               </a:rPr>
               <a:t>It is a matrix </a:t>
             </a:r>
             <a:r>
-              <a:rPr lang="en-US" sz="2800" i="1" smtClean="0">
+              <a:rPr lang="en-US" sz="2800" i="1" dirty="0" smtClean="0">
                 <a:effectLst/>
               </a:rPr>
               <a:t>A </a:t>
             </a:r>
             <a:r>
-              <a:rPr lang="en-US" sz="2800" smtClean="0">
+              <a:rPr lang="en-US" sz="2800" dirty="0" smtClean="0">
                 <a:effectLst/>
               </a:rPr>
               <a:t>= [</a:t>
             </a:r>
             <a:r>
-              <a:rPr lang="en-US" sz="2800" i="1" smtClean="0">
+              <a:rPr lang="en-US" sz="2800" i="1" dirty="0" err="1" smtClean="0">
                 <a:effectLst/>
               </a:rPr>
               <a:t>a</a:t>
             </a:r>
             <a:r>
-              <a:rPr lang="en-US" sz="2800" i="1" baseline="-25000" smtClean="0">
+              <a:rPr lang="en-US" sz="2800" i="1" baseline="-25000" dirty="0" err="1" smtClean="0">
                 <a:effectLst/>
               </a:rPr>
               <a:t>ij</a:t>
             </a:r>
             <a:r>
-              <a:rPr lang="en-US" sz="2800" smtClean="0">
+              <a:rPr lang="en-US" sz="2800" dirty="0" smtClean="0">
                 <a:effectLst/>
               </a:rPr>
               <a:t>], where </a:t>
             </a:r>
             <a:r>
-              <a:rPr lang="en-US" sz="2800" i="1" smtClean="0">
+              <a:rPr lang="en-US" sz="2800" i="1" dirty="0" err="1" smtClean="0">
                 <a:effectLst/>
               </a:rPr>
               <a:t>a</a:t>
             </a:r>
             <a:r>
-              <a:rPr lang="en-US" sz="2800" i="1" baseline="-25000" smtClean="0">
+              <a:rPr lang="en-US" sz="2800" i="1" baseline="-25000" dirty="0" err="1" smtClean="0">
                 <a:effectLst/>
               </a:rPr>
               <a:t>ij</a:t>
             </a:r>
             <a:r>
-              <a:rPr lang="en-US" sz="2800" smtClean="0">
+              <a:rPr lang="en-US" sz="2800" dirty="0" smtClean="0">
                 <a:effectLst/>
               </a:rPr>
               <a:t> is 1 if the edge </a:t>
             </a:r>
             <a:r>
-              <a:rPr lang="en-US" sz="2800" i="1" smtClean="0">
+              <a:rPr lang="en-US" sz="2800" i="1" dirty="0" err="1" smtClean="0">
                 <a:effectLst/>
               </a:rPr>
               <a:t>e</a:t>
             </a:r>
             <a:r>
-              <a:rPr lang="en-US" sz="2800" i="1" baseline="-25000" smtClean="0">
+              <a:rPr lang="en-US" sz="2800" i="1" baseline="-25000" dirty="0" err="1" smtClean="0">
                 <a:effectLst/>
               </a:rPr>
               <a:t>j</a:t>
             </a:r>
             <a:r>
-              <a:rPr lang="en-US" sz="2800" smtClean="0">
+              <a:rPr lang="en-US" sz="2800" dirty="0" smtClean="0">
                 <a:effectLst/>
               </a:rPr>
               <a:t> is incident with the vertex </a:t>
             </a:r>
             <a:r>
-              <a:rPr lang="en-US" sz="2800" i="1" smtClean="0">
+              <a:rPr lang="en-US" sz="2800" i="1" dirty="0" smtClean="0">
                 <a:effectLst/>
               </a:rPr>
               <a:t>v</a:t>
             </a:r>
             <a:r>
-              <a:rPr lang="en-US" sz="2800" i="1" baseline="-25000" smtClean="0">
+              <a:rPr lang="en-US" sz="2800" i="1" baseline="-25000" dirty="0" smtClean="0">
                 <a:effectLst/>
               </a:rPr>
               <a:t>i</a:t>
             </a:r>
             <a:r>
-              <a:rPr lang="en-US" sz="2800" smtClean="0">
-                <a:effectLst/>
-              </a:rPr>
-              <a:t> , 0 otherwise.</a:t>
-            </a:r>
+              <a:rPr lang="en-US" sz="2800" dirty="0" smtClean="0">
+                <a:effectLst/>
+              </a:rPr>
+              <a:t> , 0 otherwise</a:t>
+            </a:r>
+            <a:r>
+              <a:rPr lang="en-US" sz="2800" dirty="0" smtClean="0">
+                <a:effectLst/>
+              </a:rPr>
+              <a:t>.</a:t>
+            </a:r>
+            <a:endParaRPr lang="en-US" sz="2800" dirty="0" smtClean="0">
+              <a:effectLst/>
+            </a:endParaRPr>
           </a:p>
         </p:txBody>
       </p:sp>
@@ -15390,7 +15415,7 @@
           <a:graphicData uri="http://schemas.openxmlformats.org/presentationml/2006/ole">
             <mc:AlternateContent xmlns:mc="http://schemas.openxmlformats.org/markup-compatibility/2006">
               <mc:Choice xmlns:v="urn:schemas-microsoft-com:vml" Requires="v">
-                <p:oleObj spid="_x0000_s10315" name="Equation" r:id="rId3" imgW="1155600" imgH="1333440" progId="Equation.3">
+                <p:oleObj spid="_x0000_s10320" name="Equation" r:id="rId3" imgW="1155600" imgH="1333440" progId="Equation.3">
                   <p:embed/>
                 </p:oleObj>
               </mc:Choice>
@@ -16064,7 +16089,7 @@
           <a:graphicData uri="http://schemas.openxmlformats.org/presentationml/2006/ole">
             <mc:AlternateContent xmlns:mc="http://schemas.openxmlformats.org/markup-compatibility/2006">
               <mc:Choice xmlns:v="urn:schemas-microsoft-com:vml" Requires="v">
-                <p:oleObj spid="_x0000_s11339" name="Equation" r:id="rId3" imgW="1358640" imgH="914400" progId="Equation.3">
+                <p:oleObj spid="_x0000_s11343" name="Equation" r:id="rId3" imgW="1358640" imgH="914400" progId="Equation.3">
                   <p:embed/>
                 </p:oleObj>
               </mc:Choice>
